--- a/docs/AI in Finance.pptx
+++ b/docs/AI in Finance.pptx
@@ -205,7 +205,7 @@
           <a:p>
             <a:fld id="{23F9FA87-BFB2-A142-950E-9B3990FA81E7}" type="datetimeFigureOut">
               <a:rPr lang="en-FR" smtClean="0"/>
-              <a:t>18/04/2026</a:t>
+              <a:t>20/04/2026</a:t>
             </a:fld>
             <a:endParaRPr lang="en-FR"/>
           </a:p>
@@ -706,7 +706,7 @@
           <a:p>
             <a:fld id="{D0420BD5-E883-FD4F-A480-B6478609B021}" type="datetimeFigureOut">
               <a:rPr lang="en-FR" smtClean="0"/>
-              <a:t>18/04/2026</a:t>
+              <a:t>20/04/2026</a:t>
             </a:fld>
             <a:endParaRPr lang="en-FR"/>
           </a:p>
@@ -906,7 +906,7 @@
           <a:p>
             <a:fld id="{D0420BD5-E883-FD4F-A480-B6478609B021}" type="datetimeFigureOut">
               <a:rPr lang="en-FR" smtClean="0"/>
-              <a:t>18/04/2026</a:t>
+              <a:t>20/04/2026</a:t>
             </a:fld>
             <a:endParaRPr lang="en-FR"/>
           </a:p>
@@ -1116,7 +1116,7 @@
           <a:p>
             <a:fld id="{D0420BD5-E883-FD4F-A480-B6478609B021}" type="datetimeFigureOut">
               <a:rPr lang="en-FR" smtClean="0"/>
-              <a:t>18/04/2026</a:t>
+              <a:t>20/04/2026</a:t>
             </a:fld>
             <a:endParaRPr lang="en-FR"/>
           </a:p>
@@ -1316,7 +1316,7 @@
           <a:p>
             <a:fld id="{D0420BD5-E883-FD4F-A480-B6478609B021}" type="datetimeFigureOut">
               <a:rPr lang="en-FR" smtClean="0"/>
-              <a:t>18/04/2026</a:t>
+              <a:t>20/04/2026</a:t>
             </a:fld>
             <a:endParaRPr lang="en-FR"/>
           </a:p>
@@ -1592,7 +1592,7 @@
           <a:p>
             <a:fld id="{D0420BD5-E883-FD4F-A480-B6478609B021}" type="datetimeFigureOut">
               <a:rPr lang="en-FR" smtClean="0"/>
-              <a:t>18/04/2026</a:t>
+              <a:t>20/04/2026</a:t>
             </a:fld>
             <a:endParaRPr lang="en-FR"/>
           </a:p>
@@ -1860,7 +1860,7 @@
           <a:p>
             <a:fld id="{D0420BD5-E883-FD4F-A480-B6478609B021}" type="datetimeFigureOut">
               <a:rPr lang="en-FR" smtClean="0"/>
-              <a:t>18/04/2026</a:t>
+              <a:t>20/04/2026</a:t>
             </a:fld>
             <a:endParaRPr lang="en-FR"/>
           </a:p>
@@ -2275,7 +2275,7 @@
           <a:p>
             <a:fld id="{D0420BD5-E883-FD4F-A480-B6478609B021}" type="datetimeFigureOut">
               <a:rPr lang="en-FR" smtClean="0"/>
-              <a:t>18/04/2026</a:t>
+              <a:t>20/04/2026</a:t>
             </a:fld>
             <a:endParaRPr lang="en-FR"/>
           </a:p>
@@ -2417,7 +2417,7 @@
           <a:p>
             <a:fld id="{D0420BD5-E883-FD4F-A480-B6478609B021}" type="datetimeFigureOut">
               <a:rPr lang="en-FR" smtClean="0"/>
-              <a:t>18/04/2026</a:t>
+              <a:t>20/04/2026</a:t>
             </a:fld>
             <a:endParaRPr lang="en-FR"/>
           </a:p>
@@ -2530,7 +2530,7 @@
           <a:p>
             <a:fld id="{D0420BD5-E883-FD4F-A480-B6478609B021}" type="datetimeFigureOut">
               <a:rPr lang="en-FR" smtClean="0"/>
-              <a:t>18/04/2026</a:t>
+              <a:t>20/04/2026</a:t>
             </a:fld>
             <a:endParaRPr lang="en-FR"/>
           </a:p>
@@ -2843,7 +2843,7 @@
           <a:p>
             <a:fld id="{D0420BD5-E883-FD4F-A480-B6478609B021}" type="datetimeFigureOut">
               <a:rPr lang="en-FR" smtClean="0"/>
-              <a:t>18/04/2026</a:t>
+              <a:t>20/04/2026</a:t>
             </a:fld>
             <a:endParaRPr lang="en-FR"/>
           </a:p>
@@ -3132,7 +3132,7 @@
           <a:p>
             <a:fld id="{D0420BD5-E883-FD4F-A480-B6478609B021}" type="datetimeFigureOut">
               <a:rPr lang="en-FR" smtClean="0"/>
-              <a:t>18/04/2026</a:t>
+              <a:t>20/04/2026</a:t>
             </a:fld>
             <a:endParaRPr lang="en-FR"/>
           </a:p>
@@ -3375,7 +3375,7 @@
           <a:p>
             <a:fld id="{D0420BD5-E883-FD4F-A480-B6478609B021}" type="datetimeFigureOut">
               <a:rPr lang="en-FR" smtClean="0"/>
-              <a:t>18/04/2026</a:t>
+              <a:t>20/04/2026</a:t>
             </a:fld>
             <a:endParaRPr lang="en-FR"/>
           </a:p>
@@ -5868,36 +5868,6 @@
           </a:p>
         </p:txBody>
       </p:sp>
-      <p:pic>
-        <p:nvPicPr>
-          <p:cNvPr id="30" name="Picture 29">
-            <a:extLst>
-              <a:ext uri="{FF2B5EF4-FFF2-40B4-BE49-F238E27FC236}">
-                <a16:creationId xmlns:a16="http://schemas.microsoft.com/office/drawing/2014/main" id="{72D4EF34-22A4-AE42-B9D3-59833D89BC65}"/>
-              </a:ext>
-            </a:extLst>
-          </p:cNvPr>
-          <p:cNvPicPr>
-            <a:picLocks noChangeAspect="1"/>
-          </p:cNvPicPr>
-          <p:nvPr/>
-        </p:nvPicPr>
-        <p:blipFill>
-          <a:blip r:embed="rId4"/>
-          <a:stretch>
-            <a:fillRect/>
-          </a:stretch>
-        </p:blipFill>
-        <p:spPr>
-          <a:xfrm>
-            <a:off x="12842492" y="1652827"/>
-            <a:ext cx="4625253" cy="3308701"/>
-          </a:xfrm>
-          <a:prstGeom prst="rect">
-            <a:avLst/>
-          </a:prstGeom>
-        </p:spPr>
-      </p:pic>
     </p:spTree>
     <p:extLst>
       <p:ext uri="{BB962C8B-B14F-4D97-AF65-F5344CB8AC3E}">
@@ -6026,35 +5996,6 @@
           </a:p>
         </p:txBody>
       </p:sp>
-      <p:pic>
-        <p:nvPicPr>
-          <p:cNvPr id="4" name="Picture 3">
-            <a:extLst>
-              <a:ext uri="{FF2B5EF4-FFF2-40B4-BE49-F238E27FC236}">
-                <a16:creationId xmlns:a16="http://schemas.microsoft.com/office/drawing/2014/main" id="{93A1B9DC-BA3B-E643-A02A-FA19DFF1CC35}"/>
-              </a:ext>
-            </a:extLst>
-          </p:cNvPr>
-          <p:cNvPicPr>
-            <a:picLocks noChangeAspect="1"/>
-          </p:cNvPicPr>
-          <p:nvPr/>
-        </p:nvPicPr>
-        <p:blipFill rotWithShape="1">
-          <a:blip r:embed="rId2"/>
-          <a:srcRect t="75969"/>
-          <a:stretch/>
-        </p:blipFill>
-        <p:spPr>
-          <a:xfrm>
-            <a:off x="-4277460" y="2557681"/>
-            <a:ext cx="3930383" cy="1648047"/>
-          </a:xfrm>
-          <a:prstGeom prst="rect">
-            <a:avLst/>
-          </a:prstGeom>
-        </p:spPr>
-      </p:pic>
       <p:sp>
         <p:nvSpPr>
           <p:cNvPr id="10" name="TextBox 9">
@@ -6219,7 +6160,7 @@
           <p:nvPr/>
         </p:nvPicPr>
         <p:blipFill>
-          <a:blip r:embed="rId3">
+          <a:blip r:embed="rId2">
             <a:extLst>
               <a:ext uri="{28A0092B-C50C-407E-A947-70E740481C1C}">
                 <a14:useLocalDpi xmlns:a14="http://schemas.microsoft.com/office/drawing/2010/main" val="0"/>
@@ -6266,7 +6207,7 @@
           <p:nvPr/>
         </p:nvPicPr>
         <p:blipFill>
-          <a:blip r:embed="rId4"/>
+          <a:blip r:embed="rId3"/>
           <a:stretch>
             <a:fillRect/>
           </a:stretch>
@@ -6296,7 +6237,7 @@
           <p:nvPr/>
         </p:nvPicPr>
         <p:blipFill>
-          <a:blip r:embed="rId5"/>
+          <a:blip r:embed="rId4"/>
           <a:stretch>
             <a:fillRect/>
           </a:stretch>
@@ -6439,12 +6380,92 @@
           </a:p>
         </p:txBody>
       </p:sp>
+      <p:sp>
+        <p:nvSpPr>
+          <p:cNvPr id="10" name="TextBox 9">
+            <a:extLst>
+              <a:ext uri="{FF2B5EF4-FFF2-40B4-BE49-F238E27FC236}">
+                <a16:creationId xmlns:a16="http://schemas.microsoft.com/office/drawing/2014/main" id="{ABFCB971-8300-3A4B-8AFA-604FAF92BC94}"/>
+              </a:ext>
+            </a:extLst>
+          </p:cNvPr>
+          <p:cNvSpPr txBox="1"/>
+          <p:nvPr/>
+        </p:nvSpPr>
+        <p:spPr>
+          <a:xfrm>
+            <a:off x="483476" y="1298882"/>
+            <a:ext cx="5612524" cy="1169551"/>
+          </a:xfrm>
+          <a:prstGeom prst="rect">
+            <a:avLst/>
+          </a:prstGeom>
+          <a:noFill/>
+        </p:spPr>
+        <p:txBody>
+          <a:bodyPr wrap="square" rtlCol="0">
+            <a:spAutoFit/>
+          </a:bodyPr>
+          <a:lstStyle/>
+          <a:p>
+            <a:pPr marL="285750" indent="-285750">
+              <a:buFont typeface="Wingdings" pitchFamily="2" charset="2"/>
+              <a:buChar char="Ø"/>
+            </a:pPr>
+            <a:r>
+              <a:rPr lang="en-FR" sz="1400" dirty="0">
+                <a:latin typeface="Cambria" panose="02040503050406030204" pitchFamily="18" charset="0"/>
+              </a:rPr>
+              <a:t>Transformation des variables ”AGE” en catégorie</a:t>
+            </a:r>
+          </a:p>
+          <a:p>
+            <a:pPr marL="285750" indent="-285750">
+              <a:buFont typeface="Wingdings" pitchFamily="2" charset="2"/>
+              <a:buChar char="Ø"/>
+            </a:pPr>
+            <a:r>
+              <a:rPr lang="en-FR" sz="1400" dirty="0">
+                <a:latin typeface="Cambria" panose="02040503050406030204" pitchFamily="18" charset="0"/>
+              </a:rPr>
+              <a:t>Transformation des catégories “SEX”, “EDUCATION” et MARRIAGE” en valeur numérique</a:t>
+            </a:r>
+          </a:p>
+          <a:p>
+            <a:pPr marL="285750" indent="-285750">
+              <a:buFont typeface="Wingdings" pitchFamily="2" charset="2"/>
+              <a:buChar char="Ø"/>
+            </a:pPr>
+            <a:r>
+              <a:rPr lang="en-FR" sz="1400" dirty="0">
+                <a:latin typeface="Cambria" panose="02040503050406030204" pitchFamily="18" charset="0"/>
+              </a:rPr>
+              <a:t>Traitement de l’équilibrage de la colonne “</a:t>
+            </a:r>
+            <a:r>
+              <a:rPr lang="en-GB" sz="1400" dirty="0" err="1">
+                <a:latin typeface="Cambria" panose="02040503050406030204" pitchFamily="18" charset="0"/>
+              </a:rPr>
+              <a:t>default.payment.next.month</a:t>
+            </a:r>
+            <a:r>
+              <a:rPr lang="en-GB" sz="1400" dirty="0">
+                <a:latin typeface="Cambria" panose="02040503050406030204" pitchFamily="18" charset="0"/>
+              </a:rPr>
+              <a:t>” :</a:t>
+            </a:r>
+            <a:endParaRPr lang="en-FR" sz="1400" dirty="0">
+              <a:latin typeface="Cambria" panose="02040503050406030204" pitchFamily="18" charset="0"/>
+            </a:endParaRPr>
+          </a:p>
+        </p:txBody>
+      </p:sp>
       <p:pic>
         <p:nvPicPr>
-          <p:cNvPr id="4" name="Picture 3">
-            <a:extLst>
-              <a:ext uri="{FF2B5EF4-FFF2-40B4-BE49-F238E27FC236}">
-                <a16:creationId xmlns:a16="http://schemas.microsoft.com/office/drawing/2014/main" id="{93A1B9DC-BA3B-E643-A02A-FA19DFF1CC35}"/>
+          <p:cNvPr id="3" name="Picture 2">
+            <a:extLst>
+              <a:ext uri="{FF2B5EF4-FFF2-40B4-BE49-F238E27FC236}">
+                <a16:creationId xmlns:a16="http://schemas.microsoft.com/office/drawing/2014/main" id="{23642698-ECB0-A742-B174-6D37BF7FB188}"/>
               </a:ext>
             </a:extLst>
           </p:cNvPr>
@@ -6453,107 +6474,28 @@
           </p:cNvPicPr>
           <p:nvPr/>
         </p:nvPicPr>
-        <p:blipFill rotWithShape="1">
+        <p:blipFill>
           <a:blip r:embed="rId2"/>
-          <a:srcRect t="75969"/>
-          <a:stretch/>
+          <a:stretch>
+            <a:fillRect/>
+          </a:stretch>
         </p:blipFill>
         <p:spPr>
           <a:xfrm>
-            <a:off x="-4277460" y="2557681"/>
-            <a:ext cx="3930383" cy="1648047"/>
+            <a:off x="6654024" y="1914602"/>
+            <a:ext cx="4728869" cy="2083416"/>
           </a:xfrm>
           <a:prstGeom prst="rect">
             <a:avLst/>
           </a:prstGeom>
         </p:spPr>
       </p:pic>
-      <p:sp>
-        <p:nvSpPr>
-          <p:cNvPr id="10" name="TextBox 9">
-            <a:extLst>
-              <a:ext uri="{FF2B5EF4-FFF2-40B4-BE49-F238E27FC236}">
-                <a16:creationId xmlns:a16="http://schemas.microsoft.com/office/drawing/2014/main" id="{ABFCB971-8300-3A4B-8AFA-604FAF92BC94}"/>
-              </a:ext>
-            </a:extLst>
-          </p:cNvPr>
-          <p:cNvSpPr txBox="1"/>
-          <p:nvPr/>
-        </p:nvSpPr>
-        <p:spPr>
-          <a:xfrm>
-            <a:off x="483476" y="1298882"/>
-            <a:ext cx="5612524" cy="1169551"/>
-          </a:xfrm>
-          <a:prstGeom prst="rect">
-            <a:avLst/>
-          </a:prstGeom>
-          <a:noFill/>
-        </p:spPr>
-        <p:txBody>
-          <a:bodyPr wrap="square" rtlCol="0">
-            <a:spAutoFit/>
-          </a:bodyPr>
-          <a:lstStyle/>
-          <a:p>
-            <a:pPr marL="285750" indent="-285750">
-              <a:buFont typeface="Wingdings" pitchFamily="2" charset="2"/>
-              <a:buChar char="Ø"/>
-            </a:pPr>
-            <a:r>
-              <a:rPr lang="en-FR" sz="1400" dirty="0">
-                <a:latin typeface="Cambria" panose="02040503050406030204" pitchFamily="18" charset="0"/>
-              </a:rPr>
-              <a:t>Transformation des variables ”AGE” en catégorie</a:t>
-            </a:r>
-          </a:p>
-          <a:p>
-            <a:pPr marL="285750" indent="-285750">
-              <a:buFont typeface="Wingdings" pitchFamily="2" charset="2"/>
-              <a:buChar char="Ø"/>
-            </a:pPr>
-            <a:r>
-              <a:rPr lang="en-FR" sz="1400" dirty="0">
-                <a:latin typeface="Cambria" panose="02040503050406030204" pitchFamily="18" charset="0"/>
-              </a:rPr>
-              <a:t>Transformation des catégories “SEX”, “EDUCATION” et MARRIAGE” en valeur numérique</a:t>
-            </a:r>
-          </a:p>
-          <a:p>
-            <a:pPr marL="285750" indent="-285750">
-              <a:buFont typeface="Wingdings" pitchFamily="2" charset="2"/>
-              <a:buChar char="Ø"/>
-            </a:pPr>
-            <a:r>
-              <a:rPr lang="en-FR" sz="1400" dirty="0">
-                <a:latin typeface="Cambria" panose="02040503050406030204" pitchFamily="18" charset="0"/>
-              </a:rPr>
-              <a:t>Traitement de l’équilibrage de la colonne “</a:t>
-            </a:r>
-            <a:r>
-              <a:rPr lang="en-GB" sz="1400" dirty="0" err="1">
-                <a:latin typeface="Cambria" panose="02040503050406030204" pitchFamily="18" charset="0"/>
-              </a:rPr>
-              <a:t>default.payment.next.month</a:t>
-            </a:r>
-            <a:r>
-              <a:rPr lang="en-GB" sz="1400" dirty="0">
-                <a:latin typeface="Cambria" panose="02040503050406030204" pitchFamily="18" charset="0"/>
-              </a:rPr>
-              <a:t>” :</a:t>
-            </a:r>
-            <a:endParaRPr lang="en-FR" sz="1400" dirty="0">
-              <a:latin typeface="Cambria" panose="02040503050406030204" pitchFamily="18" charset="0"/>
-            </a:endParaRPr>
-          </a:p>
-        </p:txBody>
-      </p:sp>
       <p:pic>
         <p:nvPicPr>
-          <p:cNvPr id="3" name="Picture 2">
-            <a:extLst>
-              <a:ext uri="{FF2B5EF4-FFF2-40B4-BE49-F238E27FC236}">
-                <a16:creationId xmlns:a16="http://schemas.microsoft.com/office/drawing/2014/main" id="{23642698-ECB0-A742-B174-6D37BF7FB188}"/>
+          <p:cNvPr id="9" name="Picture 8">
+            <a:extLst>
+              <a:ext uri="{FF2B5EF4-FFF2-40B4-BE49-F238E27FC236}">
+                <a16:creationId xmlns:a16="http://schemas.microsoft.com/office/drawing/2014/main" id="{2EDCF24F-7511-0044-BD0E-DBB64E8DFA4A}"/>
               </a:ext>
             </a:extLst>
           </p:cNvPr>
@@ -6564,36 +6506,6 @@
         </p:nvPicPr>
         <p:blipFill>
           <a:blip r:embed="rId3"/>
-          <a:stretch>
-            <a:fillRect/>
-          </a:stretch>
-        </p:blipFill>
-        <p:spPr>
-          <a:xfrm>
-            <a:off x="6654024" y="1914602"/>
-            <a:ext cx="4728869" cy="2083416"/>
-          </a:xfrm>
-          <a:prstGeom prst="rect">
-            <a:avLst/>
-          </a:prstGeom>
-        </p:spPr>
-      </p:pic>
-      <p:pic>
-        <p:nvPicPr>
-          <p:cNvPr id="9" name="Picture 8">
-            <a:extLst>
-              <a:ext uri="{FF2B5EF4-FFF2-40B4-BE49-F238E27FC236}">
-                <a16:creationId xmlns:a16="http://schemas.microsoft.com/office/drawing/2014/main" id="{2EDCF24F-7511-0044-BD0E-DBB64E8DFA4A}"/>
-              </a:ext>
-            </a:extLst>
-          </p:cNvPr>
-          <p:cNvPicPr>
-            <a:picLocks noChangeAspect="1"/>
-          </p:cNvPicPr>
-          <p:nvPr/>
-        </p:nvPicPr>
-        <p:blipFill>
-          <a:blip r:embed="rId4"/>
           <a:stretch>
             <a:fillRect/>
           </a:stretch>
@@ -7016,10 +6928,10 @@
       </p:sp>
       <p:pic>
         <p:nvPicPr>
-          <p:cNvPr id="4" name="Picture 3">
-            <a:extLst>
-              <a:ext uri="{FF2B5EF4-FFF2-40B4-BE49-F238E27FC236}">
-                <a16:creationId xmlns:a16="http://schemas.microsoft.com/office/drawing/2014/main" id="{5DD4CBE8-6121-704D-B1D8-50CD2E08561F}"/>
+          <p:cNvPr id="5" name="Picture 4">
+            <a:extLst>
+              <a:ext uri="{FF2B5EF4-FFF2-40B4-BE49-F238E27FC236}">
+                <a16:creationId xmlns:a16="http://schemas.microsoft.com/office/drawing/2014/main" id="{4849A819-7A75-F145-B6CD-39C467594976}"/>
               </a:ext>
             </a:extLst>
           </p:cNvPr>
@@ -7028,15 +6940,16 @@
           </p:cNvPicPr>
           <p:nvPr/>
         </p:nvPicPr>
-        <p:blipFill rotWithShape="1">
+        <p:blipFill>
           <a:blip r:embed="rId3"/>
-          <a:srcRect b="77209"/>
-          <a:stretch/>
+          <a:stretch>
+            <a:fillRect/>
+          </a:stretch>
         </p:blipFill>
         <p:spPr>
           <a:xfrm>
-            <a:off x="-4201388" y="2214446"/>
-            <a:ext cx="4131763" cy="1562985"/>
+            <a:off x="758234" y="1398718"/>
+            <a:ext cx="3160878" cy="1083532"/>
           </a:xfrm>
           <a:prstGeom prst="rect">
             <a:avLst/>
@@ -7045,10 +6958,10 @@
       </p:pic>
       <p:pic>
         <p:nvPicPr>
-          <p:cNvPr id="5" name="Picture 4">
-            <a:extLst>
-              <a:ext uri="{FF2B5EF4-FFF2-40B4-BE49-F238E27FC236}">
-                <a16:creationId xmlns:a16="http://schemas.microsoft.com/office/drawing/2014/main" id="{4849A819-7A75-F145-B6CD-39C467594976}"/>
+          <p:cNvPr id="9" name="Picture 8">
+            <a:extLst>
+              <a:ext uri="{FF2B5EF4-FFF2-40B4-BE49-F238E27FC236}">
+                <a16:creationId xmlns:a16="http://schemas.microsoft.com/office/drawing/2014/main" id="{9091B450-BD55-7F48-8600-9781047ED2CB}"/>
               </a:ext>
             </a:extLst>
           </p:cNvPr>
@@ -7065,8 +6978,8 @@
         </p:blipFill>
         <p:spPr>
           <a:xfrm>
-            <a:off x="758234" y="1398718"/>
-            <a:ext cx="3160878" cy="1083532"/>
+            <a:off x="758234" y="2839720"/>
+            <a:ext cx="4991491" cy="3486654"/>
           </a:xfrm>
           <a:prstGeom prst="rect">
             <a:avLst/>
@@ -7075,10 +6988,10 @@
       </p:pic>
       <p:pic>
         <p:nvPicPr>
-          <p:cNvPr id="9" name="Picture 8">
-            <a:extLst>
-              <a:ext uri="{FF2B5EF4-FFF2-40B4-BE49-F238E27FC236}">
-                <a16:creationId xmlns:a16="http://schemas.microsoft.com/office/drawing/2014/main" id="{9091B450-BD55-7F48-8600-9781047ED2CB}"/>
+          <p:cNvPr id="11" name="Picture 10">
+            <a:extLst>
+              <a:ext uri="{FF2B5EF4-FFF2-40B4-BE49-F238E27FC236}">
+                <a16:creationId xmlns:a16="http://schemas.microsoft.com/office/drawing/2014/main" id="{B800F4D3-32B5-8240-AED0-08AA6963E7E7}"/>
               </a:ext>
             </a:extLst>
           </p:cNvPr>
@@ -7089,36 +7002,6 @@
         </p:nvPicPr>
         <p:blipFill>
           <a:blip r:embed="rId5"/>
-          <a:stretch>
-            <a:fillRect/>
-          </a:stretch>
-        </p:blipFill>
-        <p:spPr>
-          <a:xfrm>
-            <a:off x="758234" y="2839720"/>
-            <a:ext cx="4991491" cy="3486654"/>
-          </a:xfrm>
-          <a:prstGeom prst="rect">
-            <a:avLst/>
-          </a:prstGeom>
-        </p:spPr>
-      </p:pic>
-      <p:pic>
-        <p:nvPicPr>
-          <p:cNvPr id="11" name="Picture 10">
-            <a:extLst>
-              <a:ext uri="{FF2B5EF4-FFF2-40B4-BE49-F238E27FC236}">
-                <a16:creationId xmlns:a16="http://schemas.microsoft.com/office/drawing/2014/main" id="{B800F4D3-32B5-8240-AED0-08AA6963E7E7}"/>
-              </a:ext>
-            </a:extLst>
-          </p:cNvPr>
-          <p:cNvPicPr>
-            <a:picLocks noChangeAspect="1"/>
-          </p:cNvPicPr>
-          <p:nvPr/>
-        </p:nvPicPr>
-        <p:blipFill>
-          <a:blip r:embed="rId6"/>
           <a:stretch>
             <a:fillRect/>
           </a:stretch>
@@ -7468,12 +7351,53 @@
           </a:p>
         </p:txBody>
       </p:sp>
+      <p:sp>
+        <p:nvSpPr>
+          <p:cNvPr id="8" name="TextBox 7">
+            <a:extLst>
+              <a:ext uri="{FF2B5EF4-FFF2-40B4-BE49-F238E27FC236}">
+                <a16:creationId xmlns:a16="http://schemas.microsoft.com/office/drawing/2014/main" id="{04FBB1A5-66B7-5641-A572-54602FA75C91}"/>
+              </a:ext>
+            </a:extLst>
+          </p:cNvPr>
+          <p:cNvSpPr txBox="1"/>
+          <p:nvPr/>
+        </p:nvSpPr>
+        <p:spPr>
+          <a:xfrm>
+            <a:off x="483476" y="1298882"/>
+            <a:ext cx="6292800" cy="523220"/>
+          </a:xfrm>
+          <a:prstGeom prst="rect">
+            <a:avLst/>
+          </a:prstGeom>
+          <a:noFill/>
+        </p:spPr>
+        <p:txBody>
+          <a:bodyPr wrap="square" rtlCol="0">
+            <a:spAutoFit/>
+          </a:bodyPr>
+          <a:lstStyle/>
+          <a:p>
+            <a:pPr marL="285750" indent="-285750">
+              <a:buFont typeface="Wingdings" pitchFamily="2" charset="2"/>
+              <a:buChar char="Ø"/>
+            </a:pPr>
+            <a:r>
+              <a:rPr lang="en-FR" sz="1400" dirty="0">
+                <a:latin typeface="Cambria" panose="02040503050406030204" pitchFamily="18" charset="0"/>
+              </a:rPr>
+              <a:t>Correction de l’overfitting (AUC d’environ 0,98 train/test) pour le modèle Random Forest</a:t>
+            </a:r>
+          </a:p>
+        </p:txBody>
+      </p:sp>
       <p:pic>
         <p:nvPicPr>
-          <p:cNvPr id="4" name="Picture 3">
-            <a:extLst>
-              <a:ext uri="{FF2B5EF4-FFF2-40B4-BE49-F238E27FC236}">
-                <a16:creationId xmlns:a16="http://schemas.microsoft.com/office/drawing/2014/main" id="{28A53926-8953-4E41-9242-C12DCEC62716}"/>
+          <p:cNvPr id="5" name="Picture 4">
+            <a:extLst>
+              <a:ext uri="{FF2B5EF4-FFF2-40B4-BE49-F238E27FC236}">
+                <a16:creationId xmlns:a16="http://schemas.microsoft.com/office/drawing/2014/main" id="{4E80994A-9FF0-B34A-8D20-C5FF58D9312C}"/>
               </a:ext>
             </a:extLst>
           </p:cNvPr>
@@ -7482,68 +7406,28 @@
           </p:cNvPicPr>
           <p:nvPr/>
         </p:nvPicPr>
-        <p:blipFill rotWithShape="1">
+        <p:blipFill>
           <a:blip r:embed="rId2"/>
-          <a:srcRect t="23101" b="39070"/>
-          <a:stretch/>
+          <a:stretch>
+            <a:fillRect/>
+          </a:stretch>
         </p:blipFill>
         <p:spPr>
           <a:xfrm>
-            <a:off x="-4569258" y="2063247"/>
-            <a:ext cx="4131763" cy="2594345"/>
+            <a:off x="1089679" y="1991837"/>
+            <a:ext cx="4057650" cy="1054100"/>
           </a:xfrm>
           <a:prstGeom prst="rect">
             <a:avLst/>
           </a:prstGeom>
         </p:spPr>
       </p:pic>
-      <p:sp>
-        <p:nvSpPr>
-          <p:cNvPr id="8" name="TextBox 7">
-            <a:extLst>
-              <a:ext uri="{FF2B5EF4-FFF2-40B4-BE49-F238E27FC236}">
-                <a16:creationId xmlns:a16="http://schemas.microsoft.com/office/drawing/2014/main" id="{04FBB1A5-66B7-5641-A572-54602FA75C91}"/>
-              </a:ext>
-            </a:extLst>
-          </p:cNvPr>
-          <p:cNvSpPr txBox="1"/>
-          <p:nvPr/>
-        </p:nvSpPr>
-        <p:spPr>
-          <a:xfrm>
-            <a:off x="483476" y="1298882"/>
-            <a:ext cx="6292800" cy="523220"/>
-          </a:xfrm>
-          <a:prstGeom prst="rect">
-            <a:avLst/>
-          </a:prstGeom>
-          <a:noFill/>
-        </p:spPr>
-        <p:txBody>
-          <a:bodyPr wrap="square" rtlCol="0">
-            <a:spAutoFit/>
-          </a:bodyPr>
-          <a:lstStyle/>
-          <a:p>
-            <a:pPr marL="285750" indent="-285750">
-              <a:buFont typeface="Wingdings" pitchFamily="2" charset="2"/>
-              <a:buChar char="Ø"/>
-            </a:pPr>
-            <a:r>
-              <a:rPr lang="en-FR" sz="1400" dirty="0">
-                <a:latin typeface="Cambria" panose="02040503050406030204" pitchFamily="18" charset="0"/>
-              </a:rPr>
-              <a:t>Correction de l’overfitting (AUC d’environ 0,98 train/test) pour le modèle Random Forest</a:t>
-            </a:r>
-          </a:p>
-        </p:txBody>
-      </p:sp>
       <p:pic>
         <p:nvPicPr>
-          <p:cNvPr id="5" name="Picture 4">
-            <a:extLst>
-              <a:ext uri="{FF2B5EF4-FFF2-40B4-BE49-F238E27FC236}">
-                <a16:creationId xmlns:a16="http://schemas.microsoft.com/office/drawing/2014/main" id="{4E80994A-9FF0-B34A-8D20-C5FF58D9312C}"/>
+          <p:cNvPr id="10" name="Picture 9">
+            <a:extLst>
+              <a:ext uri="{FF2B5EF4-FFF2-40B4-BE49-F238E27FC236}">
+                <a16:creationId xmlns:a16="http://schemas.microsoft.com/office/drawing/2014/main" id="{CEF1EB60-8F04-FB4A-A13B-254759A7DF2C}"/>
               </a:ext>
             </a:extLst>
           </p:cNvPr>
@@ -7554,36 +7438,6 @@
         </p:nvPicPr>
         <p:blipFill>
           <a:blip r:embed="rId3"/>
-          <a:stretch>
-            <a:fillRect/>
-          </a:stretch>
-        </p:blipFill>
-        <p:spPr>
-          <a:xfrm>
-            <a:off x="1089679" y="1991837"/>
-            <a:ext cx="4057650" cy="1054100"/>
-          </a:xfrm>
-          <a:prstGeom prst="rect">
-            <a:avLst/>
-          </a:prstGeom>
-        </p:spPr>
-      </p:pic>
-      <p:pic>
-        <p:nvPicPr>
-          <p:cNvPr id="10" name="Picture 9">
-            <a:extLst>
-              <a:ext uri="{FF2B5EF4-FFF2-40B4-BE49-F238E27FC236}">
-                <a16:creationId xmlns:a16="http://schemas.microsoft.com/office/drawing/2014/main" id="{CEF1EB60-8F04-FB4A-A13B-254759A7DF2C}"/>
-              </a:ext>
-            </a:extLst>
-          </p:cNvPr>
-          <p:cNvPicPr>
-            <a:picLocks noChangeAspect="1"/>
-          </p:cNvPicPr>
-          <p:nvPr/>
-        </p:nvPicPr>
-        <p:blipFill>
-          <a:blip r:embed="rId4"/>
           <a:stretch>
             <a:fillRect/>
           </a:stretch>
@@ -7667,7 +7521,7 @@
           <p:nvPr/>
         </p:nvPicPr>
         <p:blipFill>
-          <a:blip r:embed="rId5"/>
+          <a:blip r:embed="rId4"/>
           <a:stretch>
             <a:fillRect/>
           </a:stretch>
@@ -7697,7 +7551,7 @@
           <p:nvPr/>
         </p:nvPicPr>
         <p:blipFill>
-          <a:blip r:embed="rId6"/>
+          <a:blip r:embed="rId5"/>
           <a:stretch>
             <a:fillRect/>
           </a:stretch>
@@ -7907,7 +7761,7 @@
           <p:nvPr/>
         </p:nvPicPr>
         <p:blipFill>
-          <a:blip r:embed="rId7"/>
+          <a:blip r:embed="rId6"/>
           <a:stretch>
             <a:fillRect/>
           </a:stretch>
@@ -8100,35 +7954,6 @@
       </p:sp>
       <p:pic>
         <p:nvPicPr>
-          <p:cNvPr id="4" name="Picture 3">
-            <a:extLst>
-              <a:ext uri="{FF2B5EF4-FFF2-40B4-BE49-F238E27FC236}">
-                <a16:creationId xmlns:a16="http://schemas.microsoft.com/office/drawing/2014/main" id="{28A53926-8953-4E41-9242-C12DCEC62716}"/>
-              </a:ext>
-            </a:extLst>
-          </p:cNvPr>
-          <p:cNvPicPr>
-            <a:picLocks noChangeAspect="1"/>
-          </p:cNvPicPr>
-          <p:nvPr/>
-        </p:nvPicPr>
-        <p:blipFill rotWithShape="1">
-          <a:blip r:embed="rId2"/>
-          <a:srcRect t="23101" b="39070"/>
-          <a:stretch/>
-        </p:blipFill>
-        <p:spPr>
-          <a:xfrm>
-            <a:off x="-4569258" y="2063247"/>
-            <a:ext cx="4131763" cy="2594345"/>
-          </a:xfrm>
-          <a:prstGeom prst="rect">
-            <a:avLst/>
-          </a:prstGeom>
-        </p:spPr>
-      </p:pic>
-      <p:pic>
-        <p:nvPicPr>
           <p:cNvPr id="7172" name="Picture 4">
             <a:extLst>
               <a:ext uri="{FF2B5EF4-FFF2-40B4-BE49-F238E27FC236}">
@@ -8142,7 +7967,7 @@
           <p:nvPr/>
         </p:nvPicPr>
         <p:blipFill>
-          <a:blip r:embed="rId3">
+          <a:blip r:embed="rId2">
             <a:extLst>
               <a:ext uri="{28A0092B-C50C-407E-A947-70E740481C1C}">
                 <a14:useLocalDpi xmlns:a14="http://schemas.microsoft.com/office/drawing/2010/main" val="0"/>
@@ -8189,7 +8014,7 @@
           <p:nvPr/>
         </p:nvPicPr>
         <p:blipFill>
-          <a:blip r:embed="rId4">
+          <a:blip r:embed="rId3">
             <a:extLst>
               <a:ext uri="{28A0092B-C50C-407E-A947-70E740481C1C}">
                 <a14:useLocalDpi xmlns:a14="http://schemas.microsoft.com/office/drawing/2010/main" val="0"/>
